--- a/site/clases/parte-1-machine-learning-clasico/080-arboles-de-decision-entrenamiento-visualizacion-cart/clase-080-arboles-de-decision-entrenamiento-visualizacion-cart-presentacion.pptx
+++ b/site/clases/parte-1-machine-learning-clasico/080-arboles-de-decision-entrenamiento-visualizacion-cart/clase-080-arboles-de-decision-entrenamiento-visualizacion-cart-presentacion.pptx
@@ -3272,7 +3272,7 @@
                 </a:solidFill>
                 <a:latin typeface="Segoe UI"/>
               </a:rPr>
-              <a:t>Parte: 1 — Machine Learning Clásico · Fuente: Géron, cap. 6 § Training and Visualizing a Decision Tree. · Duración estimada: 60 min.</a:t>
+              <a:t>Parte: 1 — Machine Learning Clásico · Fuente: Géron, cap. 6 § Training and Visualizing a Decision Tree. · Duración estimada: 60 min. · Nivel: Intermedio</a:t>
             </a:r>
           </a:p>
         </p:txBody>
@@ -3581,7 +3581,7 @@
                 </a:solidFill>
                 <a:latin typeface="Segoe UI"/>
               </a:rPr>
-              <a:t>Parte: 1 — Machine Learning Clásico · Fuente: Géron, cap. 6 § Training and Visualizing a Decision Tree. · Duración estimada: 60 min.</a:t>
+              <a:t>Parte: 1 — Machine Learning Clásico · Fuente: Géron, cap. 6 § Training and Visualizing a Decision Tree. · Duración estimada: 60 min. · Nivel: Intermedio</a:t>
             </a:r>
           </a:p>
         </p:txBody>
@@ -4933,7 +4933,7 @@
                 </a:solidFill>
                 <a:latin typeface="Segoe UI"/>
               </a:rPr>
-              <a:t>Primer bloque ejecutable del notebook.</a:t>
+              <a:t>Entrenamos un árbol de profundidad 2 sobre Iris (las 4 features) y consultamos las probabilidades de la primera flor con predict_proba. Los árboles no requieren escalado.</a:t>
             </a:r>
           </a:p>
         </p:txBody>
@@ -5020,7 +5020,273 @@
                 </a:solidFill>
                 <a:latin typeface="Courier New"/>
               </a:rPr>
-              <a:t># Imports y configuración inicial</a:t>
+              <a:t>import numpy as np</a:t>
+            </a:r>
+          </a:p>
+          <a:p>
+            <a:pPr>
+              <a:defRPr sz="1200" b="0">
+                <a:solidFill>
+                  <a:srgbClr val="F8FAFC"/>
+                </a:solidFill>
+                <a:latin typeface="Courier New"/>
+              </a:defRPr>
+            </a:pPr>
+            <a:r>
+              <a:rPr sz="1200" b="0">
+                <a:solidFill>
+                  <a:srgbClr val="F8FAFC"/>
+                </a:solidFill>
+                <a:latin typeface="Courier New"/>
+              </a:rPr>
+              <a:t>import matplotlib.pyplot as plt</a:t>
+            </a:r>
+          </a:p>
+          <a:p>
+            <a:pPr>
+              <a:defRPr sz="1200" b="0">
+                <a:solidFill>
+                  <a:srgbClr val="F8FAFC"/>
+                </a:solidFill>
+                <a:latin typeface="Courier New"/>
+              </a:defRPr>
+            </a:pPr>
+            <a:r>
+              <a:rPr sz="1200" b="0">
+                <a:solidFill>
+                  <a:srgbClr val="F8FAFC"/>
+                </a:solidFill>
+                <a:latin typeface="Courier New"/>
+              </a:rPr>
+              <a:t>from sklearn.datasets import load_iris, make_moons</a:t>
+            </a:r>
+          </a:p>
+          <a:p>
+            <a:pPr>
+              <a:defRPr sz="1200" b="0">
+                <a:solidFill>
+                  <a:srgbClr val="F8FAFC"/>
+                </a:solidFill>
+                <a:latin typeface="Courier New"/>
+              </a:defRPr>
+            </a:pPr>
+            <a:r>
+              <a:rPr sz="1200" b="0">
+                <a:solidFill>
+                  <a:srgbClr val="F8FAFC"/>
+                </a:solidFill>
+                <a:latin typeface="Courier New"/>
+              </a:rPr>
+              <a:t>from sklearn.tree import DecisionTreeClassifier, plot_tree, export_text</a:t>
+            </a:r>
+          </a:p>
+          <a:p>
+            <a:pPr>
+              <a:defRPr sz="1200" b="0">
+                <a:solidFill>
+                  <a:srgbClr val="F8FAFC"/>
+                </a:solidFill>
+                <a:latin typeface="Courier New"/>
+              </a:defRPr>
+            </a:pPr>
+            <a:r>
+              <a:rPr sz="1200" b="0">
+                <a:solidFill>
+                  <a:srgbClr val="F8FAFC"/>
+                </a:solidFill>
+                <a:latin typeface="Courier New"/>
+              </a:rPr>
+              <a:t>from sklearn.metrics import accuracy_score</a:t>
+            </a:r>
+          </a:p>
+          <a:p>
+            <a:pPr>
+              <a:defRPr sz="1200" b="0">
+                <a:solidFill>
+                  <a:srgbClr val="F8FAFC"/>
+                </a:solidFill>
+                <a:latin typeface="Courier New"/>
+              </a:defRPr>
+            </a:pPr>
+            <a:r>
+              <a:rPr sz="1200" b="0">
+                <a:solidFill>
+                  <a:srgbClr val="F8FAFC"/>
+                </a:solidFill>
+                <a:latin typeface="Courier New"/>
+              </a:rPr>
+              <a:t> </a:t>
+            </a:r>
+          </a:p>
+          <a:p>
+            <a:pPr>
+              <a:defRPr sz="1200" b="0">
+                <a:solidFill>
+                  <a:srgbClr val="F8FAFC"/>
+                </a:solidFill>
+                <a:latin typeface="Courier New"/>
+              </a:defRPr>
+            </a:pPr>
+            <a:r>
+              <a:rPr sz="1200" b="0">
+                <a:solidFill>
+                  <a:srgbClr val="F8FAFC"/>
+                </a:solidFill>
+                <a:latin typeface="Courier New"/>
+              </a:rPr>
+              <a:t>RND = 42</a:t>
+            </a:r>
+          </a:p>
+          <a:p>
+            <a:pPr>
+              <a:defRPr sz="1200" b="0">
+                <a:solidFill>
+                  <a:srgbClr val="F8FAFC"/>
+                </a:solidFill>
+                <a:latin typeface="Courier New"/>
+              </a:defRPr>
+            </a:pPr>
+            <a:r>
+              <a:rPr sz="1200" b="0">
+                <a:solidFill>
+                  <a:srgbClr val="F8FAFC"/>
+                </a:solidFill>
+                <a:latin typeface="Courier New"/>
+              </a:rPr>
+              <a:t>iris = load_iris()</a:t>
+            </a:r>
+          </a:p>
+          <a:p>
+            <a:pPr>
+              <a:defRPr sz="1200" b="0">
+                <a:solidFill>
+                  <a:srgbClr val="F8FAFC"/>
+                </a:solidFill>
+                <a:latin typeface="Courier New"/>
+              </a:defRPr>
+            </a:pPr>
+            <a:r>
+              <a:rPr sz="1200" b="0">
+                <a:solidFill>
+                  <a:srgbClr val="F8FAFC"/>
+                </a:solidFill>
+                <a:latin typeface="Courier New"/>
+              </a:rPr>
+              <a:t>X, y = iris.data, iris.target</a:t>
+            </a:r>
+          </a:p>
+          <a:p>
+            <a:pPr>
+              <a:defRPr sz="1200" b="0">
+                <a:solidFill>
+                  <a:srgbClr val="F8FAFC"/>
+                </a:solidFill>
+                <a:latin typeface="Courier New"/>
+              </a:defRPr>
+            </a:pPr>
+            <a:r>
+              <a:rPr sz="1200" b="0">
+                <a:solidFill>
+                  <a:srgbClr val="F8FAFC"/>
+                </a:solidFill>
+                <a:latin typeface="Courier New"/>
+              </a:rPr>
+              <a:t> </a:t>
+            </a:r>
+          </a:p>
+          <a:p>
+            <a:pPr>
+              <a:defRPr sz="1200" b="0">
+                <a:solidFill>
+                  <a:srgbClr val="F8FAFC"/>
+                </a:solidFill>
+                <a:latin typeface="Courier New"/>
+              </a:defRPr>
+            </a:pPr>
+            <a:r>
+              <a:rPr sz="1200" b="0">
+                <a:solidFill>
+                  <a:srgbClr val="F8FAFC"/>
+                </a:solidFill>
+                <a:latin typeface="Courier New"/>
+              </a:rPr>
+              <a:t>clf = DecisionTreeClassifier(max_depth=2, random_state=RND).fit(X, y)</a:t>
+            </a:r>
+          </a:p>
+          <a:p>
+            <a:pPr>
+              <a:defRPr sz="1200" b="0">
+                <a:solidFill>
+                  <a:srgbClr val="F8FAFC"/>
+                </a:solidFill>
+                <a:latin typeface="Courier New"/>
+              </a:defRPr>
+            </a:pPr>
+            <a:r>
+              <a:rPr sz="1200" b="0">
+                <a:solidFill>
+                  <a:srgbClr val="F8FAFC"/>
+                </a:solidFill>
+                <a:latin typeface="Courier New"/>
+              </a:rPr>
+              <a:t>acc = accuracy_score(y, clf.predict(X))</a:t>
+            </a:r>
+          </a:p>
+          <a:p>
+            <a:pPr>
+              <a:defRPr sz="1200" b="0">
+                <a:solidFill>
+                  <a:srgbClr val="F8FAFC"/>
+                </a:solidFill>
+                <a:latin typeface="Courier New"/>
+              </a:defRPr>
+            </a:pPr>
+            <a:r>
+              <a:rPr sz="1200" b="0">
+                <a:solidFill>
+                  <a:srgbClr val="F8FAFC"/>
+                </a:solidFill>
+                <a:latin typeface="Courier New"/>
+              </a:rPr>
+              <a:t>print(f"accuracy train (max_depth=2): {acc:.3f}")</a:t>
+            </a:r>
+          </a:p>
+          <a:p>
+            <a:pPr>
+              <a:defRPr sz="1200" b="0">
+                <a:solidFill>
+                  <a:srgbClr val="F8FAFC"/>
+                </a:solidFill>
+                <a:latin typeface="Courier New"/>
+              </a:defRPr>
+            </a:pPr>
+            <a:r>
+              <a:rPr sz="1200" b="0">
+                <a:solidFill>
+                  <a:srgbClr val="F8FAFC"/>
+                </a:solidFill>
+                <a:latin typeface="Courier New"/>
+              </a:rPr>
+              <a:t>assert acc &gt;= 0.90, "un arbol depth=2 ya separa muy bien Iris"</a:t>
+            </a:r>
+          </a:p>
+          <a:p>
+            <a:pPr>
+              <a:defRPr sz="1200" b="0">
+                <a:solidFill>
+                  <a:srgbClr val="F8FAFC"/>
+                </a:solidFill>
+                <a:latin typeface="Courier New"/>
+              </a:defRPr>
+            </a:pPr>
+            <a:r>
+              <a:rPr sz="1200" b="0">
+                <a:solidFill>
+                  <a:srgbClr val="F8FAFC"/>
+                </a:solidFill>
+                <a:latin typeface="Courier New"/>
+              </a:rPr>
+              <a:t>print("predict_proba de la primera flor:", np.round(clf.predict_proba(X[:1])[0], 3))</a:t>
             </a:r>
           </a:p>
         </p:txBody>
